--- a/it/slides/14-Architettura_dei_Calcolatori-Registri_e_Bus-Lab.pptx
+++ b/it/slides/14-Architettura_dei_Calcolatori-Registri_e_Bus-Lab.pptx
@@ -123,24 +123,24 @@
   <p:extLst>
     <p:ext uri="{521415D9-36F7-43E2-AB2F-B90AF26B5E84}">
       <p14:sectionLst xmlns:p14="http://schemas.microsoft.com/office/powerpoint/2010/main">
-        <p14:section name="Apertura" id="{436315b9-8f53-4059-821d-f09af5f2bc87}">
+        <p14:section name="Apertura" id="{0d3f0b49-4d70-4f08-c581-33d1378b6eb9}">
           <p14:sldIdLst>
             <p14:sldId id="256"/>
             <p14:sldId id="257"/>
           </p14:sldIdLst>
         </p14:section>
-        <p14:section name="Riscaldamento sulla macchina" id="{e759e6dc-581c-7830-6bdf-e70a2d63710b}">
+        <p14:section name="Riscaldamento sulla macchina" id="{c87d9bf8-3df1-a92e-d53c-ea6cab632670}">
           <p14:sldIdLst>
             <p14:sldId id="258"/>
           </p14:sldIdLst>
         </p14:section>
-        <p14:section name="Ritorno alla macchina" id="{e9d31cce-c08d-3d59-da03-1280744214a6}">
+        <p14:section name="Ritorno alla macchina" id="{4541e9ba-ec51-8b1b-f732-7b9915b96c14}">
           <p14:sldIdLst>
             <p14:sldId id="259"/>
             <p14:sldId id="260"/>
           </p14:sldIdLst>
         </p14:section>
-        <p14:section name="Il programma completo" id="{e82748df-aa29-6a11-c5f8-c22ed6761a12}">
+        <p14:section name="Il programma completo" id="{064bac79-41b1-ab86-245f-ba30200ba748}">
           <p14:sldIdLst>
             <p14:sldId id="261"/>
             <p14:sldId id="262"/>
@@ -150,7 +150,7 @@
             <p14:sldId id="266"/>
           </p14:sldIdLst>
         </p14:section>
-        <p14:section name="Eseguire e provare" id="{d946bbef-ca18-f736-3763-c51f3fc3d16b}">
+        <p14:section name="Eseguire e provare" id="{af86cb20-9f95-ad99-aa1a-d8724f915da3}">
           <p14:sldIdLst>
             <p14:sldId id="267"/>
             <p14:sldId id="268"/>
@@ -159,7 +159,7 @@
             <p14:sldId id="271"/>
           </p14:sldIdLst>
         </p14:section>
-        <p14:section name="Esercizi" id="{cd96fc58-38e4-5d7d-7f83-1438a43e1425}">
+        <p14:section name="Esercizi" id="{ba0f8177-7412-1667-fd0d-58063e62c116}">
           <p14:sldIdLst>
             <p14:sldId id="272"/>
           </p14:sldIdLst>

--- a/it/slides/14-Architettura_dei_Calcolatori-Registri_e_Bus-Lab.pptx
+++ b/it/slides/14-Architettura_dei_Calcolatori-Registri_e_Bus-Lab.pptx
@@ -123,24 +123,24 @@
   <p:extLst>
     <p:ext uri="{521415D9-36F7-43E2-AB2F-B90AF26B5E84}">
       <p14:sectionLst xmlns:p14="http://schemas.microsoft.com/office/powerpoint/2010/main">
-        <p14:section name="Apertura" id="{0d3f0b49-4d70-4f08-c581-33d1378b6eb9}">
+        <p14:section name="Apertura" id="{08ae120a-6b03-8aed-1b54-266daf3bc8e2}">
           <p14:sldIdLst>
             <p14:sldId id="256"/>
             <p14:sldId id="257"/>
           </p14:sldIdLst>
         </p14:section>
-        <p14:section name="Riscaldamento sulla macchina" id="{c87d9bf8-3df1-a92e-d53c-ea6cab632670}">
+        <p14:section name="Riscaldamento sulla macchina" id="{fc1914f9-f08f-22f3-aac8-8fe9adb7e239}">
           <p14:sldIdLst>
             <p14:sldId id="258"/>
           </p14:sldIdLst>
         </p14:section>
-        <p14:section name="Ritorno alla macchina" id="{4541e9ba-ec51-8b1b-f732-7b9915b96c14}">
+        <p14:section name="Ritorno alla macchina" id="{44587fa4-be0b-00a1-773c-6849be8926a1}">
           <p14:sldIdLst>
             <p14:sldId id="259"/>
             <p14:sldId id="260"/>
           </p14:sldIdLst>
         </p14:section>
-        <p14:section name="Il programma completo" id="{064bac79-41b1-ab86-245f-ba30200ba748}">
+        <p14:section name="Il programma completo" id="{92c170a4-6b2d-50a5-d98b-f553537cf2e8}">
           <p14:sldIdLst>
             <p14:sldId id="261"/>
             <p14:sldId id="262"/>
@@ -150,7 +150,7 @@
             <p14:sldId id="266"/>
           </p14:sldIdLst>
         </p14:section>
-        <p14:section name="Eseguire e provare" id="{af86cb20-9f95-ad99-aa1a-d8724f915da3}">
+        <p14:section name="Eseguire e provare" id="{a14d22d7-9214-ed77-ada9-0044bda9e90a}">
           <p14:sldIdLst>
             <p14:sldId id="267"/>
             <p14:sldId id="268"/>
@@ -159,7 +159,7 @@
             <p14:sldId id="271"/>
           </p14:sldIdLst>
         </p14:section>
-        <p14:section name="Esercizi" id="{ba0f8177-7412-1667-fd0d-58063e62c116}">
+        <p14:section name="Esercizi" id="{1be7f6d9-ee28-4b70-d820-a1df0517da4b}">
           <p14:sldIdLst>
             <p14:sldId id="272"/>
           </p14:sldIdLst>
@@ -570,7 +570,8 @@
               <a:rPr lang="en-US" dirty="0"/>
               <a:t>Questa è la presentazione del codice della Lezione 14. Mentre la presentazione della lezione sviluppa i concetti, questa raccoglie tutto ciò che si scrive e si esegue: ogni listato con il suo commento, il programma completo della lezione, il risultato che deve produrre, e la procedura per provarlo su ciascuno dei tre host. Le due presentazioni vanno lette insieme: i concetti spiegano il codice, e il codice dà ai concetti una conseguenza osservabile.
 Stato di apprendimento: DA COMPRENDERE OGGI, alla fine di questa lezione lo spiegate, lo seguite passo passo e lo applicate da soli; DA UTILIZZARE OGGI, oggi seguite e usate la ricetta; come funziona dentro si spiega più avanti, o non fa parte del corso; DA COMPRENDERE PIÙ AVANTI, riconoscete il nome e lo scopo; lo spiega una lezione successiva. Una slide senza etichetta è contesto: una storia, un esempio, una domanda, un esercizio.
-Stato di apprendimento di questa lezione. DA COMPRENDERE OGGI: i registri a scorrimento; i registri come flip-flop; bus e porte three-state. DA UTILIZZARE OGGI: il programma completo, gli strumenti di PRG32 (si usa, non si studia, in questo corso). DA COMPRENDERE PIÙ AVANTI: l'I/O mappato in memoria (Lezione 15); memorie e indirizzi (Lezione 15). Una slide senza etichetta è contesto: una storia, un esempio, una domanda, un esercizio.</a:t>
+Stato di apprendimento di questa lezione. DA COMPRENDERE OGGI: i registri a scorrimento; i registri come flip-flop; bus e porte three-state. DA UTILIZZARE OGGI: il programma completo, gli strumenti di PRG32 (si usa, non si studia, in questo corso). DA COMPRENDERE PIÙ AVANTI: l'I/O mappato in memoria (Lezione 15); memorie e indirizzi (Lezione 15). Una slide senza etichetta è contesto: una storia, un esempio, una domanda, un esercizio.
+Percorso. I risultati di oggi: (1) spiegare come i registri condividono un bus attraverso i buffer three-state; (2) usare un registro a scorrimento per il trasferimento seriale. Si appoggia su: i registri come flip-flop (Lezione 13). Prossimo passo: Lezione 15, La memoria.</a:t>
             </a:r>
             <a:endParaRPr lang="en-US" dirty="0"/>
           </a:p>
